--- a/docs/pptx/auc3/ritu-auc3-adjcif-grade2.pptx
+++ b/docs/pptx/auc3/ritu-auc3-adjcif-grade2.pptx
@@ -2271,7 +2271,7 @@
           </p:nvSpPr>
           <p:spPr>
             <a:xfrm>
-              <a:off x="910695" y="5299545"/>
+              <a:off x="910695" y="5297263"/>
               <a:ext cx="7706515" cy="0"/>
             </a:xfrm>
             <a:custGeom>
@@ -2314,7 +2314,7 @@
           </p:nvSpPr>
           <p:spPr>
             <a:xfrm>
-              <a:off x="910695" y="4737792"/>
+              <a:off x="910695" y="4730947"/>
               <a:ext cx="7706515" cy="0"/>
             </a:xfrm>
             <a:custGeom>
@@ -2357,7 +2357,7 @@
           </p:nvSpPr>
           <p:spPr>
             <a:xfrm>
-              <a:off x="910695" y="4176038"/>
+              <a:off x="910695" y="4164630"/>
               <a:ext cx="7706515" cy="0"/>
             </a:xfrm>
             <a:custGeom>
@@ -2400,7 +2400,7 @@
           </p:nvSpPr>
           <p:spPr>
             <a:xfrm>
-              <a:off x="910695" y="3614285"/>
+              <a:off x="910695" y="3598314"/>
               <a:ext cx="7706515" cy="0"/>
             </a:xfrm>
             <a:custGeom>
@@ -2443,7 +2443,7 @@
           </p:nvSpPr>
           <p:spPr>
             <a:xfrm>
-              <a:off x="910695" y="3052532"/>
+              <a:off x="910695" y="3031997"/>
               <a:ext cx="7706515" cy="0"/>
             </a:xfrm>
             <a:custGeom>
@@ -2701,7 +2701,7 @@
           </p:nvSpPr>
           <p:spPr>
             <a:xfrm>
-              <a:off x="910695" y="5018668"/>
+              <a:off x="910695" y="5014105"/>
               <a:ext cx="7706515" cy="0"/>
             </a:xfrm>
             <a:custGeom>
@@ -2744,7 +2744,7 @@
           </p:nvSpPr>
           <p:spPr>
             <a:xfrm>
-              <a:off x="910695" y="4456915"/>
+              <a:off x="910695" y="4447789"/>
               <a:ext cx="7706515" cy="0"/>
             </a:xfrm>
             <a:custGeom>
@@ -2787,7 +2787,7 @@
           </p:nvSpPr>
           <p:spPr>
             <a:xfrm>
-              <a:off x="910695" y="3895162"/>
+              <a:off x="910695" y="3881472"/>
               <a:ext cx="7706515" cy="0"/>
             </a:xfrm>
             <a:custGeom>
@@ -2830,7 +2830,7 @@
           </p:nvSpPr>
           <p:spPr>
             <a:xfrm>
-              <a:off x="910695" y="3333408"/>
+              <a:off x="910695" y="3315155"/>
               <a:ext cx="7706515" cy="0"/>
             </a:xfrm>
             <a:custGeom>
@@ -2873,7 +2873,7 @@
           </p:nvSpPr>
           <p:spPr>
             <a:xfrm>
-              <a:off x="910695" y="2771655"/>
+              <a:off x="910695" y="2748839"/>
               <a:ext cx="7706515" cy="0"/>
             </a:xfrm>
             <a:custGeom>
@@ -3045,228 +3045,222 @@
           </p:nvSpPr>
           <p:spPr>
             <a:xfrm>
-              <a:off x="1260991" y="3120733"/>
-              <a:ext cx="7005923" cy="2387252"/>
+              <a:off x="1260991" y="3125925"/>
+              <a:ext cx="7005923" cy="2380653"/>
             </a:xfrm>
             <a:custGeom>
               <a:avLst/>
               <a:pathLst>
-                <a:path w="7005923" h="2387252">
+                <a:path w="7005923" h="2380653">
                   <a:moveTo>
-                    <a:pt x="0" y="2387252"/>
+                    <a:pt x="0" y="2380653"/>
                   </a:moveTo>
                   <a:lnTo>
-                    <a:pt x="89819" y="2387252"/>
-                  </a:lnTo>
-                  <a:lnTo>
-                    <a:pt x="89819" y="2351692"/>
-                  </a:lnTo>
-                  <a:lnTo>
-                    <a:pt x="269458" y="2351692"/>
-                  </a:lnTo>
-                  <a:lnTo>
-                    <a:pt x="269458" y="2315842"/>
-                  </a:lnTo>
-                  <a:lnTo>
-                    <a:pt x="359278" y="2315842"/>
-                  </a:lnTo>
-                  <a:lnTo>
-                    <a:pt x="359278" y="2280553"/>
-                  </a:lnTo>
-                  <a:lnTo>
-                    <a:pt x="538917" y="2280553"/>
-                  </a:lnTo>
-                  <a:lnTo>
-                    <a:pt x="538917" y="2211758"/>
-                  </a:lnTo>
-                  <a:lnTo>
-                    <a:pt x="628736" y="2211758"/>
-                  </a:lnTo>
-                  <a:lnTo>
-                    <a:pt x="628736" y="2172581"/>
-                  </a:lnTo>
-                  <a:lnTo>
-                    <a:pt x="718556" y="2172581"/>
-                  </a:lnTo>
-                  <a:lnTo>
-                    <a:pt x="718556" y="2133539"/>
-                  </a:lnTo>
-                  <a:lnTo>
-                    <a:pt x="898195" y="2133539"/>
-                  </a:lnTo>
-                  <a:lnTo>
-                    <a:pt x="898195" y="2094634"/>
-                  </a:lnTo>
-                  <a:lnTo>
-                    <a:pt x="1077834" y="2094634"/>
-                  </a:lnTo>
-                  <a:lnTo>
-                    <a:pt x="1077834" y="2018702"/>
-                  </a:lnTo>
-                  <a:lnTo>
-                    <a:pt x="1167653" y="2018702"/>
-                  </a:lnTo>
-                  <a:lnTo>
-                    <a:pt x="1167653" y="1869905"/>
-                  </a:lnTo>
-                  <a:lnTo>
-                    <a:pt x="1257473" y="1869905"/>
-                  </a:lnTo>
-                  <a:lnTo>
-                    <a:pt x="1257473" y="1828704"/>
-                  </a:lnTo>
-                  <a:lnTo>
-                    <a:pt x="1796390" y="1828704"/>
-                  </a:lnTo>
-                  <a:lnTo>
-                    <a:pt x="1796390" y="1788111"/>
-                  </a:lnTo>
-                  <a:lnTo>
-                    <a:pt x="2065849" y="1788111"/>
-                  </a:lnTo>
-                  <a:lnTo>
-                    <a:pt x="2065849" y="1747051"/>
-                  </a:lnTo>
-                  <a:lnTo>
-                    <a:pt x="2155668" y="1747051"/>
-                  </a:lnTo>
-                  <a:lnTo>
-                    <a:pt x="2155668" y="1706144"/>
-                  </a:lnTo>
-                  <a:lnTo>
-                    <a:pt x="2335307" y="1706144"/>
-                  </a:lnTo>
-                  <a:lnTo>
-                    <a:pt x="2335307" y="1665230"/>
-                  </a:lnTo>
-                  <a:lnTo>
-                    <a:pt x="2425127" y="1665230"/>
-                  </a:lnTo>
-                  <a:lnTo>
-                    <a:pt x="2425127" y="1624624"/>
-                  </a:lnTo>
-                  <a:lnTo>
-                    <a:pt x="3053864" y="1624624"/>
-                  </a:lnTo>
-                  <a:lnTo>
-                    <a:pt x="3053864" y="1349519"/>
-                  </a:lnTo>
-                  <a:lnTo>
-                    <a:pt x="3143683" y="1349519"/>
-                  </a:lnTo>
-                  <a:lnTo>
-                    <a:pt x="3143683" y="1270256"/>
-                  </a:lnTo>
-                  <a:lnTo>
-                    <a:pt x="3233503" y="1270256"/>
-                  </a:lnTo>
-                  <a:lnTo>
-                    <a:pt x="3233503" y="1229456"/>
-                  </a:lnTo>
-                  <a:lnTo>
-                    <a:pt x="3323322" y="1229456"/>
-                  </a:lnTo>
-                  <a:lnTo>
-                    <a:pt x="3323322" y="1189224"/>
-                  </a:lnTo>
-                  <a:lnTo>
-                    <a:pt x="3502961" y="1189224"/>
-                  </a:lnTo>
-                  <a:lnTo>
-                    <a:pt x="3502961" y="1110393"/>
-                  </a:lnTo>
-                  <a:lnTo>
-                    <a:pt x="3952059" y="1110393"/>
-                  </a:lnTo>
-                  <a:lnTo>
-                    <a:pt x="3952059" y="992435"/>
-                  </a:lnTo>
-                  <a:lnTo>
-                    <a:pt x="4670615" y="992435"/>
-                  </a:lnTo>
-                  <a:lnTo>
-                    <a:pt x="4670615" y="913813"/>
-                  </a:lnTo>
-                  <a:lnTo>
-                    <a:pt x="4760435" y="913813"/>
-                  </a:lnTo>
-                  <a:lnTo>
-                    <a:pt x="4760435" y="875028"/>
-                  </a:lnTo>
-                  <a:lnTo>
-                    <a:pt x="4940074" y="875028"/>
-                  </a:lnTo>
-                  <a:lnTo>
-                    <a:pt x="4940074" y="754667"/>
-                  </a:lnTo>
-                  <a:lnTo>
-                    <a:pt x="5119713" y="754667"/>
-                  </a:lnTo>
-                  <a:lnTo>
-                    <a:pt x="5119713" y="714266"/>
-                  </a:lnTo>
-                  <a:lnTo>
-                    <a:pt x="5568810" y="714266"/>
-                  </a:lnTo>
-                  <a:lnTo>
-                    <a:pt x="5568810" y="674352"/>
-                  </a:lnTo>
-                  <a:lnTo>
-                    <a:pt x="5748449" y="674352"/>
-                  </a:lnTo>
-                  <a:lnTo>
-                    <a:pt x="5748449" y="634979"/>
-                  </a:lnTo>
-                  <a:lnTo>
-                    <a:pt x="5928089" y="634979"/>
-                  </a:lnTo>
-                  <a:lnTo>
-                    <a:pt x="5928089" y="596325"/>
-                  </a:lnTo>
-                  <a:lnTo>
-                    <a:pt x="6017908" y="596325"/>
-                  </a:lnTo>
-                  <a:lnTo>
-                    <a:pt x="6017908" y="558093"/>
-                  </a:lnTo>
-                  <a:lnTo>
-                    <a:pt x="6197547" y="558093"/>
-                  </a:lnTo>
-                  <a:lnTo>
-                    <a:pt x="6197547" y="482327"/>
-                  </a:lnTo>
-                  <a:lnTo>
-                    <a:pt x="6467006" y="482327"/>
-                  </a:lnTo>
-                  <a:lnTo>
-                    <a:pt x="6467006" y="443602"/>
-                  </a:lnTo>
-                  <a:lnTo>
-                    <a:pt x="6556825" y="443602"/>
-                  </a:lnTo>
-                  <a:lnTo>
-                    <a:pt x="6556825" y="366735"/>
-                  </a:lnTo>
-                  <a:lnTo>
-                    <a:pt x="6646645" y="366735"/>
-                  </a:lnTo>
-                  <a:lnTo>
-                    <a:pt x="6646645" y="291571"/>
-                  </a:lnTo>
-                  <a:lnTo>
-                    <a:pt x="6736464" y="291571"/>
-                  </a:lnTo>
-                  <a:lnTo>
-                    <a:pt x="6736464" y="216787"/>
-                  </a:lnTo>
-                  <a:lnTo>
-                    <a:pt x="6826284" y="216787"/>
-                  </a:lnTo>
-                  <a:lnTo>
-                    <a:pt x="6826284" y="73759"/>
-                  </a:lnTo>
-                  <a:lnTo>
-                    <a:pt x="7005923" y="73759"/>
+                    <a:pt x="89819" y="2380653"/>
+                  </a:lnTo>
+                  <a:lnTo>
+                    <a:pt x="89819" y="2344345"/>
+                  </a:lnTo>
+                  <a:lnTo>
+                    <a:pt x="269458" y="2344345"/>
+                  </a:lnTo>
+                  <a:lnTo>
+                    <a:pt x="269458" y="2307722"/>
+                  </a:lnTo>
+                  <a:lnTo>
+                    <a:pt x="359278" y="2307722"/>
+                  </a:lnTo>
+                  <a:lnTo>
+                    <a:pt x="359278" y="2271649"/>
+                  </a:lnTo>
+                  <a:lnTo>
+                    <a:pt x="538917" y="2271649"/>
+                  </a:lnTo>
+                  <a:lnTo>
+                    <a:pt x="538917" y="2201206"/>
+                  </a:lnTo>
+                  <a:lnTo>
+                    <a:pt x="628736" y="2201206"/>
+                  </a:lnTo>
+                  <a:lnTo>
+                    <a:pt x="628736" y="2161627"/>
+                  </a:lnTo>
+                  <a:lnTo>
+                    <a:pt x="718556" y="2161627"/>
+                  </a:lnTo>
+                  <a:lnTo>
+                    <a:pt x="718556" y="2122111"/>
+                  </a:lnTo>
+                  <a:lnTo>
+                    <a:pt x="898195" y="2122111"/>
+                  </a:lnTo>
+                  <a:lnTo>
+                    <a:pt x="898195" y="2082701"/>
+                  </a:lnTo>
+                  <a:lnTo>
+                    <a:pt x="1077834" y="2082701"/>
+                  </a:lnTo>
+                  <a:lnTo>
+                    <a:pt x="1077834" y="2005690"/>
+                  </a:lnTo>
+                  <a:lnTo>
+                    <a:pt x="1167653" y="2005690"/>
+                  </a:lnTo>
+                  <a:lnTo>
+                    <a:pt x="1167653" y="1854344"/>
+                  </a:lnTo>
+                  <a:lnTo>
+                    <a:pt x="1257473" y="1854344"/>
+                  </a:lnTo>
+                  <a:lnTo>
+                    <a:pt x="1257473" y="1812584"/>
+                  </a:lnTo>
+                  <a:lnTo>
+                    <a:pt x="1796390" y="1812584"/>
+                  </a:lnTo>
+                  <a:lnTo>
+                    <a:pt x="1796390" y="1771423"/>
+                  </a:lnTo>
+                  <a:lnTo>
+                    <a:pt x="2065849" y="1771423"/>
+                  </a:lnTo>
+                  <a:lnTo>
+                    <a:pt x="2065849" y="1729879"/>
+                  </a:lnTo>
+                  <a:lnTo>
+                    <a:pt x="2155668" y="1729879"/>
+                  </a:lnTo>
+                  <a:lnTo>
+                    <a:pt x="2155668" y="1688449"/>
+                  </a:lnTo>
+                  <a:lnTo>
+                    <a:pt x="2335307" y="1688449"/>
+                  </a:lnTo>
+                  <a:lnTo>
+                    <a:pt x="2335307" y="1646986"/>
+                  </a:lnTo>
+                  <a:lnTo>
+                    <a:pt x="3053864" y="1646986"/>
+                  </a:lnTo>
+                  <a:lnTo>
+                    <a:pt x="3053864" y="1372795"/>
+                  </a:lnTo>
+                  <a:lnTo>
+                    <a:pt x="3143683" y="1372795"/>
+                  </a:lnTo>
+                  <a:lnTo>
+                    <a:pt x="3143683" y="1293337"/>
+                  </a:lnTo>
+                  <a:lnTo>
+                    <a:pt x="3233503" y="1293337"/>
+                  </a:lnTo>
+                  <a:lnTo>
+                    <a:pt x="3233503" y="1252209"/>
+                  </a:lnTo>
+                  <a:lnTo>
+                    <a:pt x="3323322" y="1252209"/>
+                  </a:lnTo>
+                  <a:lnTo>
+                    <a:pt x="3323322" y="1211624"/>
+                  </a:lnTo>
+                  <a:lnTo>
+                    <a:pt x="3502961" y="1211624"/>
+                  </a:lnTo>
+                  <a:lnTo>
+                    <a:pt x="3502961" y="1132014"/>
+                  </a:lnTo>
+                  <a:lnTo>
+                    <a:pt x="3952059" y="1132014"/>
+                  </a:lnTo>
+                  <a:lnTo>
+                    <a:pt x="3952059" y="1012696"/>
+                  </a:lnTo>
+                  <a:lnTo>
+                    <a:pt x="4670615" y="1012696"/>
+                  </a:lnTo>
+                  <a:lnTo>
+                    <a:pt x="4670615" y="933127"/>
+                  </a:lnTo>
+                  <a:lnTo>
+                    <a:pt x="4760435" y="933127"/>
+                  </a:lnTo>
+                  <a:lnTo>
+                    <a:pt x="4760435" y="893804"/>
+                  </a:lnTo>
+                  <a:lnTo>
+                    <a:pt x="4940074" y="893804"/>
+                  </a:lnTo>
+                  <a:lnTo>
+                    <a:pt x="4940074" y="771698"/>
+                  </a:lnTo>
+                  <a:lnTo>
+                    <a:pt x="5119713" y="771698"/>
+                  </a:lnTo>
+                  <a:lnTo>
+                    <a:pt x="5119713" y="730629"/>
+                  </a:lnTo>
+                  <a:lnTo>
+                    <a:pt x="5568810" y="730629"/>
+                  </a:lnTo>
+                  <a:lnTo>
+                    <a:pt x="5568810" y="690021"/>
+                  </a:lnTo>
+                  <a:lnTo>
+                    <a:pt x="5748449" y="690021"/>
+                  </a:lnTo>
+                  <a:lnTo>
+                    <a:pt x="5748449" y="649951"/>
+                  </a:lnTo>
+                  <a:lnTo>
+                    <a:pt x="5928089" y="649951"/>
+                  </a:lnTo>
+                  <a:lnTo>
+                    <a:pt x="5928089" y="610581"/>
+                  </a:lnTo>
+                  <a:lnTo>
+                    <a:pt x="6017908" y="610581"/>
+                  </a:lnTo>
+                  <a:lnTo>
+                    <a:pt x="6017908" y="571629"/>
+                  </a:lnTo>
+                  <a:lnTo>
+                    <a:pt x="6197547" y="571629"/>
+                  </a:lnTo>
+                  <a:lnTo>
+                    <a:pt x="6197547" y="494338"/>
+                  </a:lnTo>
+                  <a:lnTo>
+                    <a:pt x="6467006" y="494338"/>
+                  </a:lnTo>
+                  <a:lnTo>
+                    <a:pt x="6467006" y="454784"/>
+                  </a:lnTo>
+                  <a:lnTo>
+                    <a:pt x="6556825" y="454784"/>
+                  </a:lnTo>
+                  <a:lnTo>
+                    <a:pt x="6556825" y="376132"/>
+                  </a:lnTo>
+                  <a:lnTo>
+                    <a:pt x="6646645" y="376132"/>
+                  </a:lnTo>
+                  <a:lnTo>
+                    <a:pt x="6646645" y="299154"/>
+                  </a:lnTo>
+                  <a:lnTo>
+                    <a:pt x="6736464" y="299154"/>
+                  </a:lnTo>
+                  <a:lnTo>
+                    <a:pt x="6736464" y="222500"/>
+                  </a:lnTo>
+                  <a:lnTo>
+                    <a:pt x="6826284" y="222500"/>
+                  </a:lnTo>
+                  <a:lnTo>
+                    <a:pt x="6826284" y="75769"/>
+                  </a:lnTo>
+                  <a:lnTo>
+                    <a:pt x="7005923" y="75769"/>
                   </a:lnTo>
                   <a:lnTo>
                     <a:pt x="7005923" y="0"/>
@@ -3299,227 +3293,221 @@
           <p:spPr>
             <a:xfrm>
               <a:off x="1260991" y="2861938"/>
-              <a:ext cx="7005923" cy="2632216"/>
+              <a:ext cx="7005923" cy="2630530"/>
             </a:xfrm>
             <a:custGeom>
               <a:avLst/>
               <a:pathLst>
-                <a:path w="7005923" h="2632216">
+                <a:path w="7005923" h="2630530">
                   <a:moveTo>
-                    <a:pt x="0" y="2632216"/>
+                    <a:pt x="0" y="2630530"/>
                   </a:moveTo>
                   <a:lnTo>
-                    <a:pt x="89819" y="2632216"/>
-                  </a:lnTo>
-                  <a:lnTo>
-                    <a:pt x="89819" y="2590119"/>
-                  </a:lnTo>
-                  <a:lnTo>
-                    <a:pt x="269458" y="2590119"/>
-                  </a:lnTo>
-                  <a:lnTo>
-                    <a:pt x="269458" y="2547830"/>
-                  </a:lnTo>
-                  <a:lnTo>
-                    <a:pt x="359278" y="2547830"/>
-                  </a:lnTo>
-                  <a:lnTo>
-                    <a:pt x="359278" y="2506340"/>
-                  </a:lnTo>
-                  <a:lnTo>
-                    <a:pt x="538917" y="2506340"/>
-                  </a:lnTo>
-                  <a:lnTo>
-                    <a:pt x="538917" y="2425807"/>
-                  </a:lnTo>
-                  <a:lnTo>
-                    <a:pt x="628736" y="2425807"/>
-                  </a:lnTo>
-                  <a:lnTo>
-                    <a:pt x="628736" y="2380134"/>
-                  </a:lnTo>
-                  <a:lnTo>
-                    <a:pt x="718556" y="2380134"/>
-                  </a:lnTo>
-                  <a:lnTo>
-                    <a:pt x="718556" y="2334743"/>
-                  </a:lnTo>
-                  <a:lnTo>
-                    <a:pt x="898195" y="2334743"/>
-                  </a:lnTo>
-                  <a:lnTo>
-                    <a:pt x="898195" y="2289627"/>
-                  </a:lnTo>
-                  <a:lnTo>
-                    <a:pt x="1077834" y="2289627"/>
-                  </a:lnTo>
-                  <a:lnTo>
-                    <a:pt x="1077834" y="2201879"/>
-                  </a:lnTo>
-                  <a:lnTo>
-                    <a:pt x="1167653" y="2201879"/>
-                  </a:lnTo>
-                  <a:lnTo>
-                    <a:pt x="1167653" y="2031016"/>
-                  </a:lnTo>
-                  <a:lnTo>
-                    <a:pt x="1257473" y="2031016"/>
-                  </a:lnTo>
-                  <a:lnTo>
-                    <a:pt x="1257473" y="1983946"/>
-                  </a:lnTo>
-                  <a:lnTo>
-                    <a:pt x="1796390" y="1983946"/>
-                  </a:lnTo>
-                  <a:lnTo>
-                    <a:pt x="1796390" y="1937671"/>
-                  </a:lnTo>
-                  <a:lnTo>
-                    <a:pt x="2065849" y="1937671"/>
-                  </a:lnTo>
-                  <a:lnTo>
-                    <a:pt x="2065849" y="1890965"/>
-                  </a:lnTo>
-                  <a:lnTo>
-                    <a:pt x="2155668" y="1890965"/>
-                  </a:lnTo>
-                  <a:lnTo>
-                    <a:pt x="2155668" y="1844533"/>
-                  </a:lnTo>
-                  <a:lnTo>
-                    <a:pt x="2335307" y="1844533"/>
-                  </a:lnTo>
-                  <a:lnTo>
-                    <a:pt x="2335307" y="1798195"/>
-                  </a:lnTo>
-                  <a:lnTo>
-                    <a:pt x="2425127" y="1798195"/>
-                  </a:lnTo>
-                  <a:lnTo>
-                    <a:pt x="2425127" y="1752306"/>
-                  </a:lnTo>
-                  <a:lnTo>
-                    <a:pt x="3053864" y="1752306"/>
-                  </a:lnTo>
-                  <a:lnTo>
-                    <a:pt x="3053864" y="1444108"/>
-                  </a:lnTo>
-                  <a:lnTo>
-                    <a:pt x="3143683" y="1444108"/>
-                  </a:lnTo>
-                  <a:lnTo>
-                    <a:pt x="3143683" y="1356196"/>
-                  </a:lnTo>
-                  <a:lnTo>
-                    <a:pt x="3233503" y="1356196"/>
-                  </a:lnTo>
-                  <a:lnTo>
-                    <a:pt x="3233503" y="1311100"/>
-                  </a:lnTo>
-                  <a:lnTo>
-                    <a:pt x="3323322" y="1311100"/>
-                  </a:lnTo>
-                  <a:lnTo>
-                    <a:pt x="3323322" y="1266735"/>
-                  </a:lnTo>
-                  <a:lnTo>
-                    <a:pt x="3502961" y="1266735"/>
-                  </a:lnTo>
-                  <a:lnTo>
-                    <a:pt x="3502961" y="1180105"/>
-                  </a:lnTo>
-                  <a:lnTo>
-                    <a:pt x="3952059" y="1180105"/>
-                  </a:lnTo>
-                  <a:lnTo>
-                    <a:pt x="3952059" y="1051210"/>
-                  </a:lnTo>
-                  <a:lnTo>
-                    <a:pt x="4670615" y="1051210"/>
-                  </a:lnTo>
-                  <a:lnTo>
-                    <a:pt x="4670615" y="965783"/>
-                  </a:lnTo>
-                  <a:lnTo>
-                    <a:pt x="4760435" y="965783"/>
-                  </a:lnTo>
-                  <a:lnTo>
-                    <a:pt x="4760435" y="923783"/>
-                  </a:lnTo>
-                  <a:lnTo>
-                    <a:pt x="4940074" y="923783"/>
-                  </a:lnTo>
-                  <a:lnTo>
-                    <a:pt x="4940074" y="794033"/>
-                  </a:lnTo>
-                  <a:lnTo>
-                    <a:pt x="5119713" y="794033"/>
-                  </a:lnTo>
-                  <a:lnTo>
-                    <a:pt x="5119713" y="750677"/>
-                  </a:lnTo>
-                  <a:lnTo>
-                    <a:pt x="5568810" y="750677"/>
-                  </a:lnTo>
-                  <a:lnTo>
-                    <a:pt x="5568810" y="707942"/>
-                  </a:lnTo>
-                  <a:lnTo>
-                    <a:pt x="5748449" y="707942"/>
-                  </a:lnTo>
-                  <a:lnTo>
-                    <a:pt x="5748449" y="665879"/>
-                  </a:lnTo>
-                  <a:lnTo>
-                    <a:pt x="5928089" y="665879"/>
-                  </a:lnTo>
-                  <a:lnTo>
-                    <a:pt x="5928089" y="624673"/>
-                  </a:lnTo>
-                  <a:lnTo>
-                    <a:pt x="6017908" y="624673"/>
-                  </a:lnTo>
-                  <a:lnTo>
-                    <a:pt x="6017908" y="584005"/>
-                  </a:lnTo>
-                  <a:lnTo>
-                    <a:pt x="6197547" y="584005"/>
-                  </a:lnTo>
-                  <a:lnTo>
-                    <a:pt x="6197547" y="503666"/>
-                  </a:lnTo>
-                  <a:lnTo>
-                    <a:pt x="6467006" y="503666"/>
-                  </a:lnTo>
-                  <a:lnTo>
-                    <a:pt x="6467006" y="462735"/>
-                  </a:lnTo>
-                  <a:lnTo>
-                    <a:pt x="6556825" y="462735"/>
-                  </a:lnTo>
-                  <a:lnTo>
-                    <a:pt x="6556825" y="381745"/>
-                  </a:lnTo>
-                  <a:lnTo>
-                    <a:pt x="6646645" y="381745"/>
-                  </a:lnTo>
-                  <a:lnTo>
-                    <a:pt x="6646645" y="302879"/>
-                  </a:lnTo>
-                  <a:lnTo>
-                    <a:pt x="6736464" y="302879"/>
-                  </a:lnTo>
-                  <a:lnTo>
-                    <a:pt x="6736464" y="224733"/>
-                  </a:lnTo>
-                  <a:lnTo>
-                    <a:pt x="6826284" y="224733"/>
-                  </a:lnTo>
-                  <a:lnTo>
-                    <a:pt x="6826284" y="76163"/>
-                  </a:lnTo>
-                  <a:lnTo>
-                    <a:pt x="7005923" y="76163"/>
+                    <a:pt x="89819" y="2630530"/>
+                  </a:lnTo>
+                  <a:lnTo>
+                    <a:pt x="89819" y="2587534"/>
+                  </a:lnTo>
+                  <a:lnTo>
+                    <a:pt x="269458" y="2587534"/>
+                  </a:lnTo>
+                  <a:lnTo>
+                    <a:pt x="269458" y="2544317"/>
+                  </a:lnTo>
+                  <a:lnTo>
+                    <a:pt x="359278" y="2544317"/>
+                  </a:lnTo>
+                  <a:lnTo>
+                    <a:pt x="359278" y="2501885"/>
+                  </a:lnTo>
+                  <a:lnTo>
+                    <a:pt x="538917" y="2501885"/>
+                  </a:lnTo>
+                  <a:lnTo>
+                    <a:pt x="538917" y="2419383"/>
+                  </a:lnTo>
+                  <a:lnTo>
+                    <a:pt x="628736" y="2419383"/>
+                  </a:lnTo>
+                  <a:lnTo>
+                    <a:pt x="628736" y="2373216"/>
+                  </a:lnTo>
+                  <a:lnTo>
+                    <a:pt x="718556" y="2373216"/>
+                  </a:lnTo>
+                  <a:lnTo>
+                    <a:pt x="718556" y="2327246"/>
+                  </a:lnTo>
+                  <a:lnTo>
+                    <a:pt x="898195" y="2327246"/>
+                  </a:lnTo>
+                  <a:lnTo>
+                    <a:pt x="898195" y="2281516"/>
+                  </a:lnTo>
+                  <a:lnTo>
+                    <a:pt x="1077834" y="2281516"/>
+                  </a:lnTo>
+                  <a:lnTo>
+                    <a:pt x="1077834" y="2192463"/>
+                  </a:lnTo>
+                  <a:lnTo>
+                    <a:pt x="1167653" y="2192463"/>
+                  </a:lnTo>
+                  <a:lnTo>
+                    <a:pt x="1167653" y="2018548"/>
+                  </a:lnTo>
+                  <a:lnTo>
+                    <a:pt x="1257473" y="2018548"/>
+                  </a:lnTo>
+                  <a:lnTo>
+                    <a:pt x="1257473" y="1970803"/>
+                  </a:lnTo>
+                  <a:lnTo>
+                    <a:pt x="1796390" y="1970803"/>
+                  </a:lnTo>
+                  <a:lnTo>
+                    <a:pt x="1796390" y="1923841"/>
+                  </a:lnTo>
+                  <a:lnTo>
+                    <a:pt x="2065849" y="1923841"/>
+                  </a:lnTo>
+                  <a:lnTo>
+                    <a:pt x="2065849" y="1876542"/>
+                  </a:lnTo>
+                  <a:lnTo>
+                    <a:pt x="2155668" y="1876542"/>
+                  </a:lnTo>
+                  <a:lnTo>
+                    <a:pt x="2155668" y="1829474"/>
+                  </a:lnTo>
+                  <a:lnTo>
+                    <a:pt x="2335307" y="1829474"/>
+                  </a:lnTo>
+                  <a:lnTo>
+                    <a:pt x="2335307" y="1782467"/>
+                  </a:lnTo>
+                  <a:lnTo>
+                    <a:pt x="3053864" y="1782467"/>
+                  </a:lnTo>
+                  <a:lnTo>
+                    <a:pt x="3053864" y="1474182"/>
+                  </a:lnTo>
+                  <a:lnTo>
+                    <a:pt x="3143683" y="1474182"/>
+                  </a:lnTo>
+                  <a:lnTo>
+                    <a:pt x="3143683" y="1385694"/>
+                  </a:lnTo>
+                  <a:lnTo>
+                    <a:pt x="3233503" y="1385694"/>
+                  </a:lnTo>
+                  <a:lnTo>
+                    <a:pt x="3233503" y="1340045"/>
+                  </a:lnTo>
+                  <a:lnTo>
+                    <a:pt x="3323322" y="1340045"/>
+                  </a:lnTo>
+                  <a:lnTo>
+                    <a:pt x="3323322" y="1295101"/>
+                  </a:lnTo>
+                  <a:lnTo>
+                    <a:pt x="3502961" y="1295101"/>
+                  </a:lnTo>
+                  <a:lnTo>
+                    <a:pt x="3502961" y="1207237"/>
+                  </a:lnTo>
+                  <a:lnTo>
+                    <a:pt x="3952059" y="1207237"/>
+                  </a:lnTo>
+                  <a:lnTo>
+                    <a:pt x="3952059" y="1076287"/>
+                  </a:lnTo>
+                  <a:lnTo>
+                    <a:pt x="4670615" y="1076287"/>
+                  </a:lnTo>
+                  <a:lnTo>
+                    <a:pt x="4670615" y="989454"/>
+                  </a:lnTo>
+                  <a:lnTo>
+                    <a:pt x="4760435" y="989454"/>
+                  </a:lnTo>
+                  <a:lnTo>
+                    <a:pt x="4760435" y="946686"/>
+                  </a:lnTo>
+                  <a:lnTo>
+                    <a:pt x="4940074" y="946686"/>
+                  </a:lnTo>
+                  <a:lnTo>
+                    <a:pt x="4940074" y="814495"/>
+                  </a:lnTo>
+                  <a:lnTo>
+                    <a:pt x="5119713" y="814495"/>
+                  </a:lnTo>
+                  <a:lnTo>
+                    <a:pt x="5119713" y="770241"/>
+                  </a:lnTo>
+                  <a:lnTo>
+                    <a:pt x="5568810" y="770241"/>
+                  </a:lnTo>
+                  <a:lnTo>
+                    <a:pt x="5568810" y="726586"/>
+                  </a:lnTo>
+                  <a:lnTo>
+                    <a:pt x="5748449" y="726586"/>
+                  </a:lnTo>
+                  <a:lnTo>
+                    <a:pt x="5748449" y="683607"/>
+                  </a:lnTo>
+                  <a:lnTo>
+                    <a:pt x="5928089" y="683607"/>
+                  </a:lnTo>
+                  <a:lnTo>
+                    <a:pt x="5928089" y="641475"/>
+                  </a:lnTo>
+                  <a:lnTo>
+                    <a:pt x="6017908" y="641475"/>
+                  </a:lnTo>
+                  <a:lnTo>
+                    <a:pt x="6017908" y="599883"/>
+                  </a:lnTo>
+                  <a:lnTo>
+                    <a:pt x="6197547" y="599883"/>
+                  </a:lnTo>
+                  <a:lnTo>
+                    <a:pt x="6197547" y="517628"/>
+                  </a:lnTo>
+                  <a:lnTo>
+                    <a:pt x="6467006" y="517628"/>
+                  </a:lnTo>
+                  <a:lnTo>
+                    <a:pt x="6467006" y="475672"/>
+                  </a:lnTo>
+                  <a:lnTo>
+                    <a:pt x="6556825" y="475672"/>
+                  </a:lnTo>
+                  <a:lnTo>
+                    <a:pt x="6556825" y="392526"/>
+                  </a:lnTo>
+                  <a:lnTo>
+                    <a:pt x="6646645" y="392526"/>
+                  </a:lnTo>
+                  <a:lnTo>
+                    <a:pt x="6646645" y="311509"/>
+                  </a:lnTo>
+                  <a:lnTo>
+                    <a:pt x="6736464" y="311509"/>
+                  </a:lnTo>
+                  <a:lnTo>
+                    <a:pt x="6736464" y="231183"/>
+                  </a:lnTo>
+                  <a:lnTo>
+                    <a:pt x="6826284" y="231183"/>
+                  </a:lnTo>
+                  <a:lnTo>
+                    <a:pt x="6826284" y="78397"/>
+                  </a:lnTo>
+                  <a:lnTo>
+                    <a:pt x="7005923" y="78397"/>
                   </a:lnTo>
                   <a:lnTo>
                     <a:pt x="7005923" y="0"/>
@@ -3597,7 +3585,7 @@
           </p:nvSpPr>
           <p:spPr>
             <a:xfrm>
-              <a:off x="692708" y="4978618"/>
+              <a:off x="692708" y="4974054"/>
               <a:ext cx="155356" cy="80101"/>
             </a:xfrm>
             <a:prstGeom prst="rect">
@@ -3643,7 +3631,7 @@
           </p:nvSpPr>
           <p:spPr>
             <a:xfrm>
-              <a:off x="692708" y="4416864"/>
+              <a:off x="692708" y="4407738"/>
               <a:ext cx="155356" cy="80101"/>
             </a:xfrm>
             <a:prstGeom prst="rect">
@@ -3689,7 +3677,7 @@
           </p:nvSpPr>
           <p:spPr>
             <a:xfrm>
-              <a:off x="692708" y="3855111"/>
+              <a:off x="692708" y="3841421"/>
               <a:ext cx="155356" cy="80101"/>
             </a:xfrm>
             <a:prstGeom prst="rect">
@@ -3735,7 +3723,7 @@
           </p:nvSpPr>
           <p:spPr>
             <a:xfrm>
-              <a:off x="692708" y="3293358"/>
+              <a:off x="692708" y="3275105"/>
               <a:ext cx="155356" cy="80101"/>
             </a:xfrm>
             <a:prstGeom prst="rect">
@@ -3781,7 +3769,7 @@
           </p:nvSpPr>
           <p:spPr>
             <a:xfrm>
-              <a:off x="692708" y="2731604"/>
+              <a:off x="692708" y="2708788"/>
               <a:ext cx="155356" cy="80101"/>
             </a:xfrm>
             <a:prstGeom prst="rect">
